--- a/Client_Presentation.pptx
+++ b/Client_Presentation.pptx
@@ -1497,7 +1497,7 @@
           <a:p>
             <a:fld id="{846CE7D5-CF57-46EF-B807-FDD0502418D4}" type="datetimeFigureOut">
               <a:rPr lang="en-US" smtClean="0"/>
-              <a:t>9/3/2026</a:t>
+              <a:t>9/7/2026</a:t>
             </a:fld>
             <a:endParaRPr lang="en-US" dirty="0"/>
           </a:p>
@@ -1667,7 +1667,7 @@
           <a:p>
             <a:fld id="{846CE7D5-CF57-46EF-B807-FDD0502418D4}" type="datetimeFigureOut">
               <a:rPr lang="en-US" smtClean="0"/>
-              <a:t>9/3/2026</a:t>
+              <a:t>9/7/2026</a:t>
             </a:fld>
             <a:endParaRPr lang="en-US" dirty="0"/>
           </a:p>
@@ -1847,7 +1847,7 @@
           <a:p>
             <a:fld id="{846CE7D5-CF57-46EF-B807-FDD0502418D4}" type="datetimeFigureOut">
               <a:rPr lang="en-US" smtClean="0"/>
-              <a:t>9/3/2026</a:t>
+              <a:t>9/7/2026</a:t>
             </a:fld>
             <a:endParaRPr lang="en-US" dirty="0"/>
           </a:p>
@@ -2017,7 +2017,7 @@
           <a:p>
             <a:fld id="{846CE7D5-CF57-46EF-B807-FDD0502418D4}" type="datetimeFigureOut">
               <a:rPr lang="en-US" smtClean="0"/>
-              <a:t>9/3/2026</a:t>
+              <a:t>9/7/2026</a:t>
             </a:fld>
             <a:endParaRPr lang="en-US" dirty="0"/>
           </a:p>
@@ -2263,7 +2263,7 @@
           <a:p>
             <a:fld id="{846CE7D5-CF57-46EF-B807-FDD0502418D4}" type="datetimeFigureOut">
               <a:rPr lang="en-US" smtClean="0"/>
-              <a:t>9/3/2026</a:t>
+              <a:t>9/7/2026</a:t>
             </a:fld>
             <a:endParaRPr lang="en-US" dirty="0"/>
           </a:p>
@@ -2495,7 +2495,7 @@
           <a:p>
             <a:fld id="{846CE7D5-CF57-46EF-B807-FDD0502418D4}" type="datetimeFigureOut">
               <a:rPr lang="en-US" smtClean="0"/>
-              <a:t>9/3/2026</a:t>
+              <a:t>9/7/2026</a:t>
             </a:fld>
             <a:endParaRPr lang="en-US" dirty="0"/>
           </a:p>
@@ -2862,7 +2862,7 @@
           <a:p>
             <a:fld id="{846CE7D5-CF57-46EF-B807-FDD0502418D4}" type="datetimeFigureOut">
               <a:rPr lang="en-US" smtClean="0"/>
-              <a:t>9/3/2026</a:t>
+              <a:t>9/7/2026</a:t>
             </a:fld>
             <a:endParaRPr lang="en-US" dirty="0"/>
           </a:p>
@@ -2980,7 +2980,7 @@
           <a:p>
             <a:fld id="{846CE7D5-CF57-46EF-B807-FDD0502418D4}" type="datetimeFigureOut">
               <a:rPr lang="en-US" smtClean="0"/>
-              <a:t>9/3/2026</a:t>
+              <a:t>9/7/2026</a:t>
             </a:fld>
             <a:endParaRPr lang="en-US" dirty="0"/>
           </a:p>
@@ -3075,7 +3075,7 @@
           <a:p>
             <a:fld id="{846CE7D5-CF57-46EF-B807-FDD0502418D4}" type="datetimeFigureOut">
               <a:rPr lang="en-US" smtClean="0"/>
-              <a:t>9/3/2026</a:t>
+              <a:t>9/7/2026</a:t>
             </a:fld>
             <a:endParaRPr lang="en-US" dirty="0"/>
           </a:p>
@@ -3352,7 +3352,7 @@
           <a:p>
             <a:fld id="{846CE7D5-CF57-46EF-B807-FDD0502418D4}" type="datetimeFigureOut">
               <a:rPr lang="en-US" smtClean="0"/>
-              <a:t>9/3/2026</a:t>
+              <a:t>9/7/2026</a:t>
             </a:fld>
             <a:endParaRPr lang="en-US" dirty="0"/>
           </a:p>
@@ -3605,7 +3605,7 @@
           <a:p>
             <a:fld id="{846CE7D5-CF57-46EF-B807-FDD0502418D4}" type="datetimeFigureOut">
               <a:rPr lang="en-US" smtClean="0"/>
-              <a:t>9/3/2026</a:t>
+              <a:t>9/7/2026</a:t>
             </a:fld>
             <a:endParaRPr lang="en-US" dirty="0"/>
           </a:p>
@@ -3818,7 +3818,7 @@
           <a:p>
             <a:fld id="{846CE7D5-CF57-46EF-B807-FDD0502418D4}" type="datetimeFigureOut">
               <a:rPr lang="en-US" smtClean="0"/>
-              <a:t>9/3/2026</a:t>
+              <a:t>9/7/2026</a:t>
             </a:fld>
             <a:endParaRPr lang="en-US" dirty="0"/>
           </a:p>
@@ -4378,7 +4378,7 @@
         <p:spPr/>
         <p:txBody>
           <a:bodyPr>
-            <a:normAutofit fontScale="85000" lnSpcReduction="20000"/>
+            <a:normAutofit fontScale="77500" lnSpcReduction="20000"/>
           </a:bodyPr>
           <a:lstStyle/>
           <a:p>
@@ -4414,6 +4414,16 @@
             <a:r>
               <a:rPr lang="en-US" sz="2300" dirty="0"/>
               <a:t>The proposed RandomForest model provided a robust prediction model that outperformed a baseline model</a:t>
+            </a:r>
+          </a:p>
+          <a:p>
+            <a:r>
+              <a:rPr lang="en-US" dirty="0"/>
+              <a:t>Deployed model sent as </a:t>
+            </a:r>
+            <a:r>
+              <a:rPr lang="en-US" dirty="0" err="1"/>
+              <a:t>Full_model.pkl</a:t>
             </a:r>
             <a:endParaRPr lang="en-US" dirty="0"/>
           </a:p>
@@ -5151,7 +5161,7 @@
         </p:spPr>
         <p:txBody>
           <a:bodyPr vert="horz" lIns="91440" tIns="45720" rIns="91440" bIns="45720" rtlCol="0" anchor="t">
-            <a:normAutofit fontScale="62500" lnSpcReduction="20000"/>
+            <a:normAutofit fontScale="55000" lnSpcReduction="20000"/>
           </a:bodyPr>
           <a:lstStyle/>
           <a:p>
@@ -5231,6 +5241,21 @@
               <a:rPr lang="en-US" dirty="0"/>
               <a:t>Identified missed opportunities and next steps to improve model performance while initial model is deployed.</a:t>
             </a:r>
+          </a:p>
+          <a:p>
+            <a:pPr lvl="1">
+              <a:buFont typeface="Courier New" panose="020B0604020202020204" pitchFamily="34" charset="0"/>
+              <a:buChar char="o"/>
+            </a:pPr>
+            <a:r>
+              <a:rPr lang="en-US" dirty="0"/>
+              <a:t>Deployed model sent as </a:t>
+            </a:r>
+            <a:r>
+              <a:rPr lang="en-US" dirty="0" err="1"/>
+              <a:t>Full_model.pkl</a:t>
+            </a:r>
+            <a:endParaRPr lang="en-US" dirty="0"/>
           </a:p>
         </p:txBody>
       </p:sp>
@@ -5801,8 +5826,8 @@
           </a:p>
         </p:txBody>
       </p:sp>
-      <mc:AlternateContent xmlns:mc="http://schemas.openxmlformats.org/markup-compatibility/2006">
-        <mc:Choice xmlns:pslz="http://schemas.microsoft.com/office/powerpoint/2016/slidezoom" Requires="pslz">
+      <mc:AlternateContent xmlns:mc="http://schemas.openxmlformats.org/markup-compatibility/2006" xmlns:pslz="http://schemas.microsoft.com/office/powerpoint/2016/slidezoom">
+        <mc:Choice Requires="pslz">
           <p:graphicFrame>
             <p:nvGraphicFramePr>
               <p:cNvPr id="5" name="Slide Zoom 4">
@@ -5859,7 +5884,7 @@
             </a:graphic>
           </p:graphicFrame>
         </mc:Choice>
-        <mc:Fallback>
+        <mc:Fallback xmlns="">
           <p:pic>
             <p:nvPicPr>
               <p:cNvPr id="5" name="Slide Zoom 4">
@@ -5876,7 +5901,7 @@
               <p:nvPr/>
             </p:nvPicPr>
             <p:blipFill>
-              <a:blip r:embed="rId2"/>
+              <a:blip r:embed="rId4"/>
               <a:stretch>
                 <a:fillRect/>
               </a:stretch>
@@ -5898,8 +5923,8 @@
           </p:pic>
         </mc:Fallback>
       </mc:AlternateContent>
-      <mc:AlternateContent xmlns:mc="http://schemas.openxmlformats.org/markup-compatibility/2006">
-        <mc:Choice xmlns:pslz="http://schemas.microsoft.com/office/powerpoint/2016/slidezoom" Requires="pslz">
+      <mc:AlternateContent xmlns:mc="http://schemas.openxmlformats.org/markup-compatibility/2006" xmlns:pslz="http://schemas.microsoft.com/office/powerpoint/2016/slidezoom">
+        <mc:Choice Requires="pslz">
           <p:graphicFrame>
             <p:nvGraphicFramePr>
               <p:cNvPr id="7" name="Slide Zoom 6">
@@ -5930,7 +5955,7 @@
                   <pslz:sldZmObj sldId="267" cId="595343263">
                     <pslz:zmPr id="{5DE42393-59AC-4802-9393-B6FDED87A65C}" returnToParent="0">
                       <p166:blipFill xmlns:p166="http://schemas.microsoft.com/office/powerpoint/2016/6/main">
-                        <a:blip r:embed="rId4"/>
+                        <a:blip r:embed="rId5"/>
                         <a:stretch>
                           <a:fillRect/>
                         </a:stretch>
@@ -5956,11 +5981,11 @@
             </a:graphic>
           </p:graphicFrame>
         </mc:Choice>
-        <mc:Fallback>
+        <mc:Fallback xmlns="">
           <p:pic>
             <p:nvPicPr>
               <p:cNvPr id="7" name="Slide Zoom 6">
-                <a:hlinkClick r:id="rId5" action="ppaction://hlinksldjump"/>
+                <a:hlinkClick r:id="rId6" action="ppaction://hlinksldjump"/>
                 <a:extLst>
                   <a:ext uri="{FF2B5EF4-FFF2-40B4-BE49-F238E27FC236}">
                     <a16:creationId xmlns:a16="http://schemas.microsoft.com/office/drawing/2014/main" id="{B134ECAC-4115-46D9-3C61-CABB0EE9DD7D}"/>
@@ -5973,7 +5998,7 @@
               <p:nvPr/>
             </p:nvPicPr>
             <p:blipFill>
-              <a:blip r:embed="rId4"/>
+              <a:blip r:embed="rId7"/>
               <a:stretch>
                 <a:fillRect/>
               </a:stretch>
@@ -9137,8 +9162,8 @@
           </a:prstGeom>
         </p:spPr>
       </p:pic>
-      <mc:AlternateContent xmlns:mc="http://schemas.openxmlformats.org/markup-compatibility/2006">
-        <mc:Choice xmlns:pslz="http://schemas.microsoft.com/office/powerpoint/2016/slidezoom" Requires="pslz">
+      <mc:AlternateContent xmlns:mc="http://schemas.openxmlformats.org/markup-compatibility/2006" xmlns:pslz="http://schemas.microsoft.com/office/powerpoint/2016/slidezoom">
+        <mc:Choice Requires="pslz">
           <p:graphicFrame>
             <p:nvGraphicFramePr>
               <p:cNvPr id="16" name="Slide Zoom 15">
@@ -9195,7 +9220,7 @@
             </a:graphic>
           </p:graphicFrame>
         </mc:Choice>
-        <mc:Fallback>
+        <mc:Fallback xmlns="">
           <p:pic>
             <p:nvPicPr>
               <p:cNvPr id="16" name="Slide Zoom 15">
@@ -9212,7 +9237,7 @@
               <p:nvPr/>
             </p:nvPicPr>
             <p:blipFill>
-              <a:blip r:embed="rId4"/>
+              <a:blip r:embed="rId6"/>
               <a:stretch>
                 <a:fillRect/>
               </a:stretch>
@@ -9249,7 +9274,7 @@
           <p:nvPr/>
         </p:nvPicPr>
         <p:blipFill>
-          <a:blip r:embed="rId6"/>
+          <a:blip r:embed="rId7"/>
           <a:stretch>
             <a:fillRect/>
           </a:stretch>
@@ -9279,7 +9304,7 @@
           <p:nvPr/>
         </p:nvPicPr>
         <p:blipFill>
-          <a:blip r:embed="rId7"/>
+          <a:blip r:embed="rId8"/>
           <a:stretch>
             <a:fillRect/>
           </a:stretch>

--- a/Client_Presentation.pptx
+++ b/Client_Presentation.pptx
@@ -1497,7 +1497,7 @@
           <a:p>
             <a:fld id="{846CE7D5-CF57-46EF-B807-FDD0502418D4}" type="datetimeFigureOut">
               <a:rPr lang="en-US" smtClean="0"/>
-              <a:t>9/7/2026</a:t>
+              <a:t>9/8/2026</a:t>
             </a:fld>
             <a:endParaRPr lang="en-US" dirty="0"/>
           </a:p>
@@ -1667,7 +1667,7 @@
           <a:p>
             <a:fld id="{846CE7D5-CF57-46EF-B807-FDD0502418D4}" type="datetimeFigureOut">
               <a:rPr lang="en-US" smtClean="0"/>
-              <a:t>9/7/2026</a:t>
+              <a:t>9/8/2026</a:t>
             </a:fld>
             <a:endParaRPr lang="en-US" dirty="0"/>
           </a:p>
@@ -1847,7 +1847,7 @@
           <a:p>
             <a:fld id="{846CE7D5-CF57-46EF-B807-FDD0502418D4}" type="datetimeFigureOut">
               <a:rPr lang="en-US" smtClean="0"/>
-              <a:t>9/7/2026</a:t>
+              <a:t>9/8/2026</a:t>
             </a:fld>
             <a:endParaRPr lang="en-US" dirty="0"/>
           </a:p>
@@ -2017,7 +2017,7 @@
           <a:p>
             <a:fld id="{846CE7D5-CF57-46EF-B807-FDD0502418D4}" type="datetimeFigureOut">
               <a:rPr lang="en-US" smtClean="0"/>
-              <a:t>9/7/2026</a:t>
+              <a:t>9/8/2026</a:t>
             </a:fld>
             <a:endParaRPr lang="en-US" dirty="0"/>
           </a:p>
@@ -2263,7 +2263,7 @@
           <a:p>
             <a:fld id="{846CE7D5-CF57-46EF-B807-FDD0502418D4}" type="datetimeFigureOut">
               <a:rPr lang="en-US" smtClean="0"/>
-              <a:t>9/7/2026</a:t>
+              <a:t>9/8/2026</a:t>
             </a:fld>
             <a:endParaRPr lang="en-US" dirty="0"/>
           </a:p>
@@ -2495,7 +2495,7 @@
           <a:p>
             <a:fld id="{846CE7D5-CF57-46EF-B807-FDD0502418D4}" type="datetimeFigureOut">
               <a:rPr lang="en-US" smtClean="0"/>
-              <a:t>9/7/2026</a:t>
+              <a:t>9/8/2026</a:t>
             </a:fld>
             <a:endParaRPr lang="en-US" dirty="0"/>
           </a:p>
@@ -2862,7 +2862,7 @@
           <a:p>
             <a:fld id="{846CE7D5-CF57-46EF-B807-FDD0502418D4}" type="datetimeFigureOut">
               <a:rPr lang="en-US" smtClean="0"/>
-              <a:t>9/7/2026</a:t>
+              <a:t>9/8/2026</a:t>
             </a:fld>
             <a:endParaRPr lang="en-US" dirty="0"/>
           </a:p>
@@ -2980,7 +2980,7 @@
           <a:p>
             <a:fld id="{846CE7D5-CF57-46EF-B807-FDD0502418D4}" type="datetimeFigureOut">
               <a:rPr lang="en-US" smtClean="0"/>
-              <a:t>9/7/2026</a:t>
+              <a:t>9/8/2026</a:t>
             </a:fld>
             <a:endParaRPr lang="en-US" dirty="0"/>
           </a:p>
@@ -3075,7 +3075,7 @@
           <a:p>
             <a:fld id="{846CE7D5-CF57-46EF-B807-FDD0502418D4}" type="datetimeFigureOut">
               <a:rPr lang="en-US" smtClean="0"/>
-              <a:t>9/7/2026</a:t>
+              <a:t>9/8/2026</a:t>
             </a:fld>
             <a:endParaRPr lang="en-US" dirty="0"/>
           </a:p>
@@ -3352,7 +3352,7 @@
           <a:p>
             <a:fld id="{846CE7D5-CF57-46EF-B807-FDD0502418D4}" type="datetimeFigureOut">
               <a:rPr lang="en-US" smtClean="0"/>
-              <a:t>9/7/2026</a:t>
+              <a:t>9/8/2026</a:t>
             </a:fld>
             <a:endParaRPr lang="en-US" dirty="0"/>
           </a:p>
@@ -3605,7 +3605,7 @@
           <a:p>
             <a:fld id="{846CE7D5-CF57-46EF-B807-FDD0502418D4}" type="datetimeFigureOut">
               <a:rPr lang="en-US" smtClean="0"/>
-              <a:t>9/7/2026</a:t>
+              <a:t>9/8/2026</a:t>
             </a:fld>
             <a:endParaRPr lang="en-US" dirty="0"/>
           </a:p>
@@ -3818,7 +3818,7 @@
           <a:p>
             <a:fld id="{846CE7D5-CF57-46EF-B807-FDD0502418D4}" type="datetimeFigureOut">
               <a:rPr lang="en-US" smtClean="0"/>
-              <a:t>9/7/2026</a:t>
+              <a:t>9/8/2026</a:t>
             </a:fld>
             <a:endParaRPr lang="en-US" dirty="0"/>
           </a:p>
@@ -5611,7 +5611,23 @@
           <a:p>
             <a:r>
               <a:rPr lang="en-US" dirty="0"/>
-              <a:t>Customers are equi-valuable, no customer is more valuable than another</a:t>
+              <a:t>Customers </a:t>
+            </a:r>
+            <a:r>
+              <a:rPr lang="en-US"/>
+              <a:t>are </a:t>
+            </a:r>
+            <a:r>
+              <a:rPr lang="en-US" dirty="0"/>
+              <a:t>e</a:t>
+            </a:r>
+            <a:r>
+              <a:rPr lang="en-US"/>
+              <a:t>quivalent</a:t>
+            </a:r>
+            <a:r>
+              <a:rPr lang="en-US" dirty="0"/>
+              <a:t>, no customer is more valuable than another</a:t>
             </a:r>
           </a:p>
           <a:p>
